--- a/TenderExtractor/notes.pptx
+++ b/TenderExtractor/notes.pptx
@@ -5,17 +5,20 @@
     <p:sldMasterId id="2147483648" r:id="rId1"/>
   </p:sldMasterIdLst>
   <p:notesMasterIdLst>
-    <p:notesMasterId r:id="rId7"/>
+    <p:notesMasterId r:id="rId10"/>
   </p:notesMasterIdLst>
   <p:handoutMasterIdLst>
-    <p:handoutMasterId r:id="rId8"/>
+    <p:handoutMasterId r:id="rId11"/>
   </p:handoutMasterIdLst>
   <p:sldIdLst>
     <p:sldId id="257" r:id="rId2"/>
-    <p:sldId id="276" r:id="rId3"/>
-    <p:sldId id="277" r:id="rId4"/>
-    <p:sldId id="278" r:id="rId5"/>
-    <p:sldId id="275" r:id="rId6"/>
+    <p:sldId id="279" r:id="rId3"/>
+    <p:sldId id="280" r:id="rId4"/>
+    <p:sldId id="281" r:id="rId5"/>
+    <p:sldId id="276" r:id="rId6"/>
+    <p:sldId id="277" r:id="rId7"/>
+    <p:sldId id="278" r:id="rId8"/>
+    <p:sldId id="275" r:id="rId9"/>
   </p:sldIdLst>
   <p:sldSz cx="12192000" cy="6858000"/>
   <p:notesSz cx="6858000" cy="9144000"/>
@@ -219,7 +222,7 @@
           <a:p>
             <a:fld id="{7BAEECA8-D063-486F-AE31-5020270C1449}" type="datetimeFigureOut">
               <a:rPr lang="en-US" smtClean="0"/>
-              <a:t>8/7/2026</a:t>
+              <a:t>8/10/2026</a:t>
             </a:fld>
             <a:endParaRPr lang="en-US"/>
           </a:p>
@@ -396,7 +399,7 @@
           <a:p>
             <a:fld id="{CB233BD1-3BA8-448D-9D08-7846095EA517}" type="datetimeFigureOut">
               <a:rPr lang="en-US" smtClean="0"/>
-              <a:t>8/7/2026</a:t>
+              <a:t>8/10/2026</a:t>
             </a:fld>
             <a:endParaRPr lang="en-US"/>
           </a:p>
@@ -810,7 +813,7 @@
           <a:p>
             <a:fld id="{6383FAE1-13DE-4511-8C1B-C8AFB720664C}" type="datetimeFigureOut">
               <a:rPr lang="en-US" smtClean="0"/>
-              <a:t>8/7/2026</a:t>
+              <a:t>8/10/2026</a:t>
             </a:fld>
             <a:endParaRPr lang="en-US"/>
           </a:p>
@@ -1008,7 +1011,7 @@
           <a:p>
             <a:fld id="{6383FAE1-13DE-4511-8C1B-C8AFB720664C}" type="datetimeFigureOut">
               <a:rPr lang="en-US" smtClean="0"/>
-              <a:t>8/7/2026</a:t>
+              <a:t>8/10/2026</a:t>
             </a:fld>
             <a:endParaRPr lang="en-US"/>
           </a:p>
@@ -1216,7 +1219,7 @@
           <a:p>
             <a:fld id="{6383FAE1-13DE-4511-8C1B-C8AFB720664C}" type="datetimeFigureOut">
               <a:rPr lang="en-US" smtClean="0"/>
-              <a:t>8/7/2026</a:t>
+              <a:t>8/10/2026</a:t>
             </a:fld>
             <a:endParaRPr lang="en-US"/>
           </a:p>
@@ -1414,7 +1417,7 @@
           <a:p>
             <a:fld id="{6383FAE1-13DE-4511-8C1B-C8AFB720664C}" type="datetimeFigureOut">
               <a:rPr lang="en-US" smtClean="0"/>
-              <a:t>8/7/2026</a:t>
+              <a:t>8/10/2026</a:t>
             </a:fld>
             <a:endParaRPr lang="en-US"/>
           </a:p>
@@ -1689,7 +1692,7 @@
           <a:p>
             <a:fld id="{6383FAE1-13DE-4511-8C1B-C8AFB720664C}" type="datetimeFigureOut">
               <a:rPr lang="en-US" smtClean="0"/>
-              <a:t>8/7/2026</a:t>
+              <a:t>8/10/2026</a:t>
             </a:fld>
             <a:endParaRPr lang="en-US"/>
           </a:p>
@@ -1954,7 +1957,7 @@
           <a:p>
             <a:fld id="{6383FAE1-13DE-4511-8C1B-C8AFB720664C}" type="datetimeFigureOut">
               <a:rPr lang="en-US" smtClean="0"/>
-              <a:t>8/7/2026</a:t>
+              <a:t>8/10/2026</a:t>
             </a:fld>
             <a:endParaRPr lang="en-US"/>
           </a:p>
@@ -2366,7 +2369,7 @@
           <a:p>
             <a:fld id="{6383FAE1-13DE-4511-8C1B-C8AFB720664C}" type="datetimeFigureOut">
               <a:rPr lang="en-US" smtClean="0"/>
-              <a:t>8/7/2026</a:t>
+              <a:t>8/10/2026</a:t>
             </a:fld>
             <a:endParaRPr lang="en-US"/>
           </a:p>
@@ -2507,7 +2510,7 @@
           <a:p>
             <a:fld id="{6383FAE1-13DE-4511-8C1B-C8AFB720664C}" type="datetimeFigureOut">
               <a:rPr lang="en-US" smtClean="0"/>
-              <a:t>8/7/2026</a:t>
+              <a:t>8/10/2026</a:t>
             </a:fld>
             <a:endParaRPr lang="en-US"/>
           </a:p>
@@ -2620,7 +2623,7 @@
           <a:p>
             <a:fld id="{6383FAE1-13DE-4511-8C1B-C8AFB720664C}" type="datetimeFigureOut">
               <a:rPr lang="en-US" smtClean="0"/>
-              <a:t>8/7/2026</a:t>
+              <a:t>8/10/2026</a:t>
             </a:fld>
             <a:endParaRPr lang="en-US"/>
           </a:p>
@@ -2931,7 +2934,7 @@
           <a:p>
             <a:fld id="{6383FAE1-13DE-4511-8C1B-C8AFB720664C}" type="datetimeFigureOut">
               <a:rPr lang="en-US" smtClean="0"/>
-              <a:t>8/7/2026</a:t>
+              <a:t>8/10/2026</a:t>
             </a:fld>
             <a:endParaRPr lang="en-US"/>
           </a:p>
@@ -3222,7 +3225,7 @@
           <a:p>
             <a:fld id="{6383FAE1-13DE-4511-8C1B-C8AFB720664C}" type="datetimeFigureOut">
               <a:rPr lang="en-US" smtClean="0"/>
-              <a:t>8/7/2026</a:t>
+              <a:t>8/10/2026</a:t>
             </a:fld>
             <a:endParaRPr lang="en-US"/>
           </a:p>
@@ -3466,7 +3469,7 @@
           <a:p>
             <a:fld id="{6383FAE1-13DE-4511-8C1B-C8AFB720664C}" type="datetimeFigureOut">
               <a:rPr lang="en-US" smtClean="0"/>
-              <a:t>8/7/2026</a:t>
+              <a:t>8/10/2026</a:t>
             </a:fld>
             <a:endParaRPr lang="en-US"/>
           </a:p>
@@ -4046,6 +4049,543 @@
         <p:cNvPr id="1" name="">
           <a:extLst>
             <a:ext uri="{FF2B5EF4-FFF2-40B4-BE49-F238E27FC236}">
+              <a16:creationId xmlns:a16="http://schemas.microsoft.com/office/drawing/2014/main" id="{C484003B-30B0-DC6C-85A9-C3617A51A7B5}"/>
+            </a:ext>
+          </a:extLst>
+        </p:cNvPr>
+        <p:cNvGrpSpPr/>
+        <p:nvPr/>
+      </p:nvGrpSpPr>
+      <p:grpSpPr>
+        <a:xfrm>
+          <a:off x="0" y="0"/>
+          <a:ext cx="0" cy="0"/>
+          <a:chOff x="0" y="0"/>
+          <a:chExt cx="0" cy="0"/>
+        </a:xfrm>
+      </p:grpSpPr>
+      <p:sp>
+        <p:nvSpPr>
+          <p:cNvPr id="2" name="TextBox 1">
+            <a:extLst>
+              <a:ext uri="{FF2B5EF4-FFF2-40B4-BE49-F238E27FC236}">
+                <a16:creationId xmlns:a16="http://schemas.microsoft.com/office/drawing/2014/main" id="{1D233ECB-A6BB-940B-3030-37EA7219D5A9}"/>
+              </a:ext>
+            </a:extLst>
+          </p:cNvPr>
+          <p:cNvSpPr txBox="1"/>
+          <p:nvPr/>
+        </p:nvSpPr>
+        <p:spPr>
+          <a:xfrm>
+            <a:off x="219456" y="94816"/>
+            <a:ext cx="6089904" cy="1477328"/>
+          </a:xfrm>
+          <a:prstGeom prst="rect">
+            <a:avLst/>
+          </a:prstGeom>
+          <a:noFill/>
+        </p:spPr>
+        <p:txBody>
+          <a:bodyPr wrap="square" rtlCol="0">
+            <a:spAutoFit/>
+          </a:bodyPr>
+          <a:lstStyle/>
+          <a:p>
+            <a:r>
+              <a:rPr lang="en-US" dirty="0">
+                <a:solidFill>
+                  <a:schemeClr val="accent6">
+                    <a:lumMod val="60000"/>
+                    <a:lumOff val="40000"/>
+                  </a:schemeClr>
+                </a:solidFill>
+              </a:rPr>
+              <a:t>Key information needed</a:t>
+            </a:r>
+          </a:p>
+          <a:p>
+            <a:endParaRPr lang="en-US" dirty="0">
+              <a:solidFill>
+                <a:schemeClr val="accent6">
+                  <a:lumMod val="60000"/>
+                  <a:lumOff val="40000"/>
+                </a:schemeClr>
+              </a:solidFill>
+            </a:endParaRPr>
+          </a:p>
+          <a:p>
+            <a:pPr marL="342900" indent="-342900">
+              <a:buAutoNum type="arabicParenR"/>
+            </a:pPr>
+            <a:r>
+              <a:rPr lang="en-US" dirty="0">
+                <a:solidFill>
+                  <a:schemeClr val="accent6">
+                    <a:lumMod val="60000"/>
+                    <a:lumOff val="40000"/>
+                  </a:schemeClr>
+                </a:solidFill>
+              </a:rPr>
+              <a:t>Tabular data  - DONE</a:t>
+            </a:r>
+          </a:p>
+          <a:p>
+            <a:pPr marL="342900" indent="-342900">
+              <a:buAutoNum type="arabicParenR"/>
+            </a:pPr>
+            <a:r>
+              <a:rPr lang="en-US" dirty="0">
+                <a:solidFill>
+                  <a:schemeClr val="accent6">
+                    <a:lumMod val="60000"/>
+                    <a:lumOff val="40000"/>
+                  </a:schemeClr>
+                </a:solidFill>
+              </a:rPr>
+              <a:t>List of Documents to be scanned and uploaded within the period of bid submission - DONE</a:t>
+            </a:r>
+          </a:p>
+        </p:txBody>
+      </p:sp>
+      <p:pic>
+        <p:nvPicPr>
+          <p:cNvPr id="6" name="Picture 5">
+            <a:extLst>
+              <a:ext uri="{FF2B5EF4-FFF2-40B4-BE49-F238E27FC236}">
+                <a16:creationId xmlns:a16="http://schemas.microsoft.com/office/drawing/2014/main" id="{23A71CDF-7581-5CBF-2A5C-5B6FD3B774A1}"/>
+              </a:ext>
+            </a:extLst>
+          </p:cNvPr>
+          <p:cNvPicPr>
+            <a:picLocks noChangeAspect="1"/>
+          </p:cNvPicPr>
+          <p:nvPr/>
+        </p:nvPicPr>
+        <p:blipFill>
+          <a:blip r:embed="rId2"/>
+          <a:stretch>
+            <a:fillRect/>
+          </a:stretch>
+        </p:blipFill>
+        <p:spPr>
+          <a:xfrm>
+            <a:off x="6830567" y="186243"/>
+            <a:ext cx="5047563" cy="1662899"/>
+          </a:xfrm>
+          <a:prstGeom prst="rect">
+            <a:avLst/>
+          </a:prstGeom>
+        </p:spPr>
+      </p:pic>
+      <p:pic>
+        <p:nvPicPr>
+          <p:cNvPr id="10" name="Picture 9">
+            <a:extLst>
+              <a:ext uri="{FF2B5EF4-FFF2-40B4-BE49-F238E27FC236}">
+                <a16:creationId xmlns:a16="http://schemas.microsoft.com/office/drawing/2014/main" id="{67DA44D2-68C7-0416-DC95-005D52818FFB}"/>
+              </a:ext>
+            </a:extLst>
+          </p:cNvPr>
+          <p:cNvPicPr>
+            <a:picLocks noChangeAspect="1"/>
+          </p:cNvPicPr>
+          <p:nvPr/>
+        </p:nvPicPr>
+        <p:blipFill>
+          <a:blip r:embed="rId3"/>
+          <a:stretch>
+            <a:fillRect/>
+          </a:stretch>
+        </p:blipFill>
+        <p:spPr>
+          <a:xfrm>
+            <a:off x="1779050" y="1775990"/>
+            <a:ext cx="4960497" cy="5008858"/>
+          </a:xfrm>
+          <a:prstGeom prst="rect">
+            <a:avLst/>
+          </a:prstGeom>
+        </p:spPr>
+      </p:pic>
+    </p:spTree>
+    <p:extLst>
+      <p:ext uri="{BB962C8B-B14F-4D97-AF65-F5344CB8AC3E}">
+        <p14:creationId xmlns:p14="http://schemas.microsoft.com/office/powerpoint/2010/main" val="3592064590"/>
+      </p:ext>
+    </p:extLst>
+  </p:cSld>
+  <p:clrMapOvr>
+    <a:masterClrMapping/>
+  </p:clrMapOvr>
+</p:sld>
+</file>
+
+<file path=ppt/slides/slide3.xml><?xml version="1.0" encoding="utf-8"?>
+<p:sld xmlns:a="http://schemas.openxmlformats.org/drawingml/2006/main" xmlns:r="http://schemas.openxmlformats.org/officeDocument/2006/relationships" xmlns:p="http://schemas.openxmlformats.org/presentationml/2006/main">
+  <p:cSld>
+    <p:spTree>
+      <p:nvGrpSpPr>
+        <p:cNvPr id="1" name="">
+          <a:extLst>
+            <a:ext uri="{FF2B5EF4-FFF2-40B4-BE49-F238E27FC236}">
+              <a16:creationId xmlns:a16="http://schemas.microsoft.com/office/drawing/2014/main" id="{9DE369D7-7D69-B5DE-982F-795D5ED301C3}"/>
+            </a:ext>
+          </a:extLst>
+        </p:cNvPr>
+        <p:cNvGrpSpPr/>
+        <p:nvPr/>
+      </p:nvGrpSpPr>
+      <p:grpSpPr>
+        <a:xfrm>
+          <a:off x="0" y="0"/>
+          <a:ext cx="0" cy="0"/>
+          <a:chOff x="0" y="0"/>
+          <a:chExt cx="0" cy="0"/>
+        </a:xfrm>
+      </p:grpSpPr>
+      <p:sp>
+        <p:nvSpPr>
+          <p:cNvPr id="2" name="TextBox 1">
+            <a:extLst>
+              <a:ext uri="{FF2B5EF4-FFF2-40B4-BE49-F238E27FC236}">
+                <a16:creationId xmlns:a16="http://schemas.microsoft.com/office/drawing/2014/main" id="{EA2BA02F-0859-4ECD-CE30-DD4F7E8ED117}"/>
+              </a:ext>
+            </a:extLst>
+          </p:cNvPr>
+          <p:cNvSpPr txBox="1"/>
+          <p:nvPr/>
+        </p:nvSpPr>
+        <p:spPr>
+          <a:xfrm>
+            <a:off x="248332" y="274320"/>
+            <a:ext cx="4753436" cy="1200329"/>
+          </a:xfrm>
+          <a:prstGeom prst="rect">
+            <a:avLst/>
+          </a:prstGeom>
+          <a:noFill/>
+        </p:spPr>
+        <p:txBody>
+          <a:bodyPr wrap="square" rtlCol="0">
+            <a:spAutoFit/>
+          </a:bodyPr>
+          <a:lstStyle/>
+          <a:p>
+            <a:r>
+              <a:rPr lang="en-US" dirty="0">
+                <a:solidFill>
+                  <a:schemeClr val="accent6">
+                    <a:lumMod val="60000"/>
+                    <a:lumOff val="40000"/>
+                  </a:schemeClr>
+                </a:solidFill>
+              </a:rPr>
+              <a:t>Key information needed</a:t>
+            </a:r>
+          </a:p>
+          <a:p>
+            <a:endParaRPr lang="en-US" dirty="0">
+              <a:solidFill>
+                <a:schemeClr val="accent6">
+                  <a:lumMod val="60000"/>
+                  <a:lumOff val="40000"/>
+                </a:schemeClr>
+              </a:solidFill>
+            </a:endParaRPr>
+          </a:p>
+          <a:p>
+            <a:r>
+              <a:rPr lang="en-US" dirty="0">
+                <a:solidFill>
+                  <a:schemeClr val="accent6">
+                    <a:lumMod val="60000"/>
+                    <a:lumOff val="40000"/>
+                  </a:schemeClr>
+                </a:solidFill>
+              </a:rPr>
+              <a:t>3) Terms and Conditions </a:t>
+            </a:r>
+            <a:r>
+              <a:rPr lang="en-US">
+                <a:solidFill>
+                  <a:schemeClr val="accent6">
+                    <a:lumMod val="60000"/>
+                    <a:lumOff val="40000"/>
+                  </a:schemeClr>
+                </a:solidFill>
+              </a:rPr>
+              <a:t>- DONE</a:t>
+            </a:r>
+            <a:endParaRPr lang="en-US" dirty="0">
+              <a:solidFill>
+                <a:schemeClr val="accent6">
+                  <a:lumMod val="60000"/>
+                  <a:lumOff val="40000"/>
+                </a:schemeClr>
+              </a:solidFill>
+            </a:endParaRPr>
+          </a:p>
+          <a:p>
+            <a:r>
+              <a:rPr lang="en-US" dirty="0">
+                <a:solidFill>
+                  <a:schemeClr val="accent6">
+                    <a:lumMod val="60000"/>
+                    <a:lumOff val="40000"/>
+                  </a:schemeClr>
+                </a:solidFill>
+              </a:rPr>
+              <a:t>4) List of acceptable make - TODO</a:t>
+            </a:r>
+          </a:p>
+        </p:txBody>
+      </p:sp>
+      <p:pic>
+        <p:nvPicPr>
+          <p:cNvPr id="8" name="Picture 7">
+            <a:extLst>
+              <a:ext uri="{FF2B5EF4-FFF2-40B4-BE49-F238E27FC236}">
+                <a16:creationId xmlns:a16="http://schemas.microsoft.com/office/drawing/2014/main" id="{F10D3C23-7281-94F6-F502-53E8E3BBD786}"/>
+              </a:ext>
+            </a:extLst>
+          </p:cNvPr>
+          <p:cNvPicPr>
+            <a:picLocks noChangeAspect="1"/>
+          </p:cNvPicPr>
+          <p:nvPr/>
+        </p:nvPicPr>
+        <p:blipFill>
+          <a:blip r:embed="rId2"/>
+          <a:stretch>
+            <a:fillRect/>
+          </a:stretch>
+        </p:blipFill>
+        <p:spPr>
+          <a:xfrm>
+            <a:off x="5332395" y="447259"/>
+            <a:ext cx="6611273" cy="2981741"/>
+          </a:xfrm>
+          <a:prstGeom prst="rect">
+            <a:avLst/>
+          </a:prstGeom>
+        </p:spPr>
+      </p:pic>
+      <p:pic>
+        <p:nvPicPr>
+          <p:cNvPr id="4" name="Picture 3">
+            <a:extLst>
+              <a:ext uri="{FF2B5EF4-FFF2-40B4-BE49-F238E27FC236}">
+                <a16:creationId xmlns:a16="http://schemas.microsoft.com/office/drawing/2014/main" id="{A3FAED63-70C7-8CC7-51FA-DA9DF79918CA}"/>
+              </a:ext>
+            </a:extLst>
+          </p:cNvPr>
+          <p:cNvPicPr>
+            <a:picLocks noChangeAspect="1"/>
+          </p:cNvPicPr>
+          <p:nvPr/>
+        </p:nvPicPr>
+        <p:blipFill>
+          <a:blip r:embed="rId3"/>
+          <a:stretch>
+            <a:fillRect/>
+          </a:stretch>
+        </p:blipFill>
+        <p:spPr>
+          <a:xfrm>
+            <a:off x="5332395" y="4237304"/>
+            <a:ext cx="6287377" cy="2553056"/>
+          </a:xfrm>
+          <a:prstGeom prst="rect">
+            <a:avLst/>
+          </a:prstGeom>
+        </p:spPr>
+      </p:pic>
+    </p:spTree>
+    <p:extLst>
+      <p:ext uri="{BB962C8B-B14F-4D97-AF65-F5344CB8AC3E}">
+        <p14:creationId xmlns:p14="http://schemas.microsoft.com/office/powerpoint/2010/main" val="60292205"/>
+      </p:ext>
+    </p:extLst>
+  </p:cSld>
+  <p:clrMapOvr>
+    <a:masterClrMapping/>
+  </p:clrMapOvr>
+</p:sld>
+</file>
+
+<file path=ppt/slides/slide4.xml><?xml version="1.0" encoding="utf-8"?>
+<p:sld xmlns:a="http://schemas.openxmlformats.org/drawingml/2006/main" xmlns:r="http://schemas.openxmlformats.org/officeDocument/2006/relationships" xmlns:p="http://schemas.openxmlformats.org/presentationml/2006/main">
+  <p:cSld>
+    <p:spTree>
+      <p:nvGrpSpPr>
+        <p:cNvPr id="1" name="">
+          <a:extLst>
+            <a:ext uri="{FF2B5EF4-FFF2-40B4-BE49-F238E27FC236}">
+              <a16:creationId xmlns:a16="http://schemas.microsoft.com/office/drawing/2014/main" id="{69C4A19F-C286-121A-2524-2834D0FB941D}"/>
+            </a:ext>
+          </a:extLst>
+        </p:cNvPr>
+        <p:cNvGrpSpPr/>
+        <p:nvPr/>
+      </p:nvGrpSpPr>
+      <p:grpSpPr>
+        <a:xfrm>
+          <a:off x="0" y="0"/>
+          <a:ext cx="0" cy="0"/>
+          <a:chOff x="0" y="0"/>
+          <a:chExt cx="0" cy="0"/>
+        </a:xfrm>
+      </p:grpSpPr>
+      <p:sp>
+        <p:nvSpPr>
+          <p:cNvPr id="2" name="TextBox 1">
+            <a:extLst>
+              <a:ext uri="{FF2B5EF4-FFF2-40B4-BE49-F238E27FC236}">
+                <a16:creationId xmlns:a16="http://schemas.microsoft.com/office/drawing/2014/main" id="{8BF6D5DE-2350-351C-B58D-580B194CED4F}"/>
+              </a:ext>
+            </a:extLst>
+          </p:cNvPr>
+          <p:cNvSpPr txBox="1"/>
+          <p:nvPr/>
+        </p:nvSpPr>
+        <p:spPr>
+          <a:xfrm>
+            <a:off x="467788" y="1764792"/>
+            <a:ext cx="9919796" cy="2677656"/>
+          </a:xfrm>
+          <a:prstGeom prst="rect">
+            <a:avLst/>
+          </a:prstGeom>
+          <a:noFill/>
+        </p:spPr>
+        <p:txBody>
+          <a:bodyPr wrap="square" rtlCol="0">
+            <a:spAutoFit/>
+          </a:bodyPr>
+          <a:lstStyle/>
+          <a:p>
+            <a:r>
+              <a:rPr lang="en-US" sz="2400" dirty="0">
+                <a:solidFill>
+                  <a:schemeClr val="accent6">
+                    <a:lumMod val="60000"/>
+                    <a:lumOff val="40000"/>
+                  </a:schemeClr>
+                </a:solidFill>
+              </a:rPr>
+              <a:t>Plan</a:t>
+            </a:r>
+          </a:p>
+          <a:p>
+            <a:pPr marL="457200" indent="-457200">
+              <a:buAutoNum type="arabicParenR"/>
+            </a:pPr>
+            <a:r>
+              <a:rPr lang="en-US" sz="2400" dirty="0">
+                <a:solidFill>
+                  <a:schemeClr val="accent6">
+                    <a:lumMod val="60000"/>
+                    <a:lumOff val="40000"/>
+                  </a:schemeClr>
+                </a:solidFill>
+              </a:rPr>
+              <a:t>Create a small 10-page pdf documents from the original 60+ pages PDF documents. This saves tokens during development. Use this for testing + POC </a:t>
+            </a:r>
+          </a:p>
+          <a:p>
+            <a:pPr marL="457200" indent="-457200">
+              <a:buAutoNum type="arabicParenR"/>
+            </a:pPr>
+            <a:r>
+              <a:rPr lang="en-US" sz="2400" dirty="0">
+                <a:solidFill>
+                  <a:schemeClr val="accent6">
+                    <a:lumMod val="60000"/>
+                    <a:lumOff val="40000"/>
+                  </a:schemeClr>
+                </a:solidFill>
+              </a:rPr>
+              <a:t>Create 3 separate test PDF documents</a:t>
+            </a:r>
+          </a:p>
+          <a:p>
+            <a:pPr marL="457200" indent="-457200">
+              <a:buAutoNum type="arabicParenR"/>
+            </a:pPr>
+            <a:r>
+              <a:rPr lang="en-US" sz="2400" dirty="0">
+                <a:solidFill>
+                  <a:schemeClr val="accent6">
+                    <a:lumMod val="60000"/>
+                    <a:lumOff val="40000"/>
+                  </a:schemeClr>
+                </a:solidFill>
+              </a:rPr>
+              <a:t>Use </a:t>
+            </a:r>
+            <a:r>
+              <a:rPr lang="en-US" sz="2400" dirty="0" err="1">
+                <a:solidFill>
+                  <a:schemeClr val="accent6">
+                    <a:lumMod val="60000"/>
+                    <a:lumOff val="40000"/>
+                  </a:schemeClr>
+                </a:solidFill>
+              </a:rPr>
+              <a:t>Streamlit</a:t>
+            </a:r>
+            <a:r>
+              <a:rPr lang="en-US" sz="2400" dirty="0">
+                <a:solidFill>
+                  <a:schemeClr val="accent6">
+                    <a:lumMod val="60000"/>
+                    <a:lumOff val="40000"/>
+                  </a:schemeClr>
+                </a:solidFill>
+              </a:rPr>
+              <a:t> for UI</a:t>
+            </a:r>
+          </a:p>
+          <a:p>
+            <a:pPr marL="457200" indent="-457200">
+              <a:buAutoNum type="arabicParenR"/>
+            </a:pPr>
+            <a:r>
+              <a:rPr lang="en-US" sz="2400" dirty="0">
+                <a:solidFill>
+                  <a:schemeClr val="accent6">
+                    <a:lumMod val="60000"/>
+                    <a:lumOff val="40000"/>
+                  </a:schemeClr>
+                </a:solidFill>
+              </a:rPr>
+              <a:t>TODO: Extract the red text</a:t>
+            </a:r>
+          </a:p>
+        </p:txBody>
+      </p:sp>
+    </p:spTree>
+    <p:extLst>
+      <p:ext uri="{BB962C8B-B14F-4D97-AF65-F5344CB8AC3E}">
+        <p14:creationId xmlns:p14="http://schemas.microsoft.com/office/powerpoint/2010/main" val="796727467"/>
+      </p:ext>
+    </p:extLst>
+  </p:cSld>
+  <p:clrMapOvr>
+    <a:masterClrMapping/>
+  </p:clrMapOvr>
+</p:sld>
+</file>
+
+<file path=ppt/slides/slide5.xml><?xml version="1.0" encoding="utf-8"?>
+<p:sld xmlns:a="http://schemas.openxmlformats.org/drawingml/2006/main" xmlns:r="http://schemas.openxmlformats.org/officeDocument/2006/relationships" xmlns:p="http://schemas.openxmlformats.org/presentationml/2006/main">
+  <p:cSld>
+    <p:spTree>
+      <p:nvGrpSpPr>
+        <p:cNvPr id="1" name="">
+          <a:extLst>
+            <a:ext uri="{FF2B5EF4-FFF2-40B4-BE49-F238E27FC236}">
               <a16:creationId xmlns:a16="http://schemas.microsoft.com/office/drawing/2014/main" id="{529EBDA7-B44E-B824-B04A-1C6D1FB40ED7}"/>
             </a:ext>
           </a:extLst>
@@ -4861,7 +5401,7 @@
 </p:sld>
 </file>
 
-<file path=ppt/slides/slide3.xml><?xml version="1.0" encoding="utf-8"?>
+<file path=ppt/slides/slide6.xml><?xml version="1.0" encoding="utf-8"?>
 <p:sld xmlns:a="http://schemas.openxmlformats.org/drawingml/2006/main" xmlns:r="http://schemas.openxmlformats.org/officeDocument/2006/relationships" xmlns:p="http://schemas.openxmlformats.org/presentationml/2006/main">
   <p:cSld>
     <p:spTree>
@@ -5226,7 +5766,7 @@
 </p:sld>
 </file>
 
-<file path=ppt/slides/slide4.xml><?xml version="1.0" encoding="utf-8"?>
+<file path=ppt/slides/slide7.xml><?xml version="1.0" encoding="utf-8"?>
 <p:sld xmlns:a="http://schemas.openxmlformats.org/drawingml/2006/main" xmlns:r="http://schemas.openxmlformats.org/officeDocument/2006/relationships" xmlns:p="http://schemas.openxmlformats.org/presentationml/2006/main">
   <p:cSld>
     <p:spTree>
@@ -5249,6 +5789,202 @@
           <a:chExt cx="0" cy="0"/>
         </a:xfrm>
       </p:grpSpPr>
+      <p:sp>
+        <p:nvSpPr>
+          <p:cNvPr id="2" name="TextBox 1">
+            <a:extLst>
+              <a:ext uri="{FF2B5EF4-FFF2-40B4-BE49-F238E27FC236}">
+                <a16:creationId xmlns:a16="http://schemas.microsoft.com/office/drawing/2014/main" id="{19D77067-E55D-6400-A819-F534C9288741}"/>
+              </a:ext>
+            </a:extLst>
+          </p:cNvPr>
+          <p:cNvSpPr txBox="1"/>
+          <p:nvPr/>
+        </p:nvSpPr>
+        <p:spPr>
+          <a:xfrm>
+            <a:off x="201168" y="877824"/>
+            <a:ext cx="11439144" cy="2308324"/>
+          </a:xfrm>
+          <a:prstGeom prst="rect">
+            <a:avLst/>
+          </a:prstGeom>
+          <a:noFill/>
+        </p:spPr>
+        <p:txBody>
+          <a:bodyPr wrap="square" rtlCol="0">
+            <a:spAutoFit/>
+          </a:bodyPr>
+          <a:lstStyle/>
+          <a:p>
+            <a:r>
+              <a:rPr lang="en-US" sz="2400" dirty="0">
+                <a:solidFill>
+                  <a:schemeClr val="accent6">
+                    <a:lumMod val="60000"/>
+                    <a:lumOff val="40000"/>
+                  </a:schemeClr>
+                </a:solidFill>
+              </a:rPr>
+              <a:t>Notes:</a:t>
+            </a:r>
+          </a:p>
+          <a:p>
+            <a:endParaRPr lang="en-US" sz="2400" dirty="0">
+              <a:solidFill>
+                <a:schemeClr val="accent6">
+                  <a:lumMod val="60000"/>
+                  <a:lumOff val="40000"/>
+                </a:schemeClr>
+              </a:solidFill>
+            </a:endParaRPr>
+          </a:p>
+          <a:p>
+            <a:pPr marL="342900" indent="-342900">
+              <a:buFont typeface="+mj-lt"/>
+              <a:buAutoNum type="arabicPeriod"/>
+            </a:pPr>
+            <a:r>
+              <a:rPr lang="en-US" sz="2400" dirty="0">
+                <a:solidFill>
+                  <a:schemeClr val="accent6">
+                    <a:lumMod val="60000"/>
+                    <a:lumOff val="40000"/>
+                  </a:schemeClr>
+                </a:solidFill>
+              </a:rPr>
+              <a:t>The OCR data is cached.</a:t>
+            </a:r>
+          </a:p>
+          <a:p>
+            <a:pPr marL="342900" indent="-342900">
+              <a:buFont typeface="+mj-lt"/>
+              <a:buAutoNum type="arabicPeriod"/>
+            </a:pPr>
+            <a:r>
+              <a:rPr lang="en-US" sz="2400" dirty="0">
+                <a:solidFill>
+                  <a:schemeClr val="accent6">
+                    <a:lumMod val="60000"/>
+                    <a:lumOff val="40000"/>
+                  </a:schemeClr>
+                </a:solidFill>
+              </a:rPr>
+              <a:t>NIT data is only in first 4 pages. So, look for this in first 4 page only – saves tokens</a:t>
+            </a:r>
+          </a:p>
+          <a:p>
+            <a:pPr marL="342900" indent="-342900">
+              <a:buFont typeface="+mj-lt"/>
+              <a:buAutoNum type="arabicPeriod"/>
+            </a:pPr>
+            <a:r>
+              <a:rPr lang="en-US" sz="2400" dirty="0">
+                <a:solidFill>
+                  <a:schemeClr val="accent6">
+                    <a:lumMod val="60000"/>
+                    <a:lumOff val="40000"/>
+                  </a:schemeClr>
+                </a:solidFill>
+              </a:rPr>
+              <a:t>Terms and Conditions have heading part. So, use this to find pages that has T&amp;C and extract  data from this page for accurate result.</a:t>
+            </a:r>
+          </a:p>
+        </p:txBody>
+      </p:sp>
+      <p:sp>
+        <p:nvSpPr>
+          <p:cNvPr id="4" name="TextBox 3">
+            <a:extLst>
+              <a:ext uri="{FF2B5EF4-FFF2-40B4-BE49-F238E27FC236}">
+                <a16:creationId xmlns:a16="http://schemas.microsoft.com/office/drawing/2014/main" id="{EF078490-996B-9A20-B637-177E0FCFC791}"/>
+              </a:ext>
+            </a:extLst>
+          </p:cNvPr>
+          <p:cNvSpPr txBox="1"/>
+          <p:nvPr/>
+        </p:nvSpPr>
+        <p:spPr>
+          <a:xfrm>
+            <a:off x="201168" y="4224296"/>
+            <a:ext cx="11439144" cy="1938992"/>
+          </a:xfrm>
+          <a:prstGeom prst="rect">
+            <a:avLst/>
+          </a:prstGeom>
+          <a:noFill/>
+        </p:spPr>
+        <p:txBody>
+          <a:bodyPr wrap="square">
+            <a:spAutoFit/>
+          </a:bodyPr>
+          <a:lstStyle/>
+          <a:p>
+            <a:r>
+              <a:rPr lang="en-US" sz="2400" dirty="0">
+                <a:solidFill>
+                  <a:schemeClr val="accent6">
+                    <a:lumMod val="60000"/>
+                    <a:lumOff val="40000"/>
+                  </a:schemeClr>
+                </a:solidFill>
+              </a:rPr>
+              <a:t>Challenges:</a:t>
+            </a:r>
+          </a:p>
+          <a:p>
+            <a:pPr marL="457200" indent="-457200">
+              <a:buAutoNum type="arabicParenR"/>
+            </a:pPr>
+            <a:r>
+              <a:rPr lang="en-US" sz="2400" dirty="0">
+                <a:solidFill>
+                  <a:schemeClr val="accent6">
+                    <a:lumMod val="60000"/>
+                    <a:lumOff val="40000"/>
+                  </a:schemeClr>
+                </a:solidFill>
+              </a:rPr>
+              <a:t>Documents to be scanned + uploaded, this is not in  heading. So used partial  match to find pages that has this and extract data from this page for accurate result</a:t>
+            </a:r>
+          </a:p>
+          <a:p>
+            <a:pPr marL="457200" indent="-457200">
+              <a:buAutoNum type="arabicParenR"/>
+            </a:pPr>
+            <a:r>
+              <a:rPr lang="en-US" sz="2400" dirty="0">
+                <a:solidFill>
+                  <a:schemeClr val="accent6">
+                    <a:lumMod val="60000"/>
+                    <a:lumOff val="40000"/>
+                  </a:schemeClr>
+                </a:solidFill>
+              </a:rPr>
+              <a:t>The terms and conditions get spilled onto the subsequent pages and those pages do not contain heading T&amp;C .  The serial numbers </a:t>
+            </a:r>
+            <a:r>
+              <a:rPr lang="en-US" sz="2400">
+                <a:solidFill>
+                  <a:schemeClr val="accent6">
+                    <a:lumMod val="60000"/>
+                    <a:lumOff val="40000"/>
+                  </a:schemeClr>
+                </a:solidFill>
+              </a:rPr>
+              <a:t>are preserved.</a:t>
+            </a:r>
+            <a:endParaRPr lang="en-US" sz="2400" dirty="0">
+              <a:solidFill>
+                <a:schemeClr val="accent6">
+                  <a:lumMod val="60000"/>
+                  <a:lumOff val="40000"/>
+                </a:schemeClr>
+              </a:solidFill>
+            </a:endParaRPr>
+          </a:p>
+        </p:txBody>
+      </p:sp>
     </p:spTree>
     <p:extLst>
       <p:ext uri="{BB962C8B-B14F-4D97-AF65-F5344CB8AC3E}">
@@ -5262,7 +5998,7 @@
 </p:sld>
 </file>
 
-<file path=ppt/slides/slide5.xml><?xml version="1.0" encoding="utf-8"?>
+<file path=ppt/slides/slide8.xml><?xml version="1.0" encoding="utf-8"?>
 <p:sld xmlns:a="http://schemas.openxmlformats.org/drawingml/2006/main" xmlns:r="http://schemas.openxmlformats.org/officeDocument/2006/relationships" xmlns:p="http://schemas.openxmlformats.org/presentationml/2006/main">
   <p:cSld>
     <p:spTree>
